--- a/m1/diapositivos/sessao-01-m1-f01.pptx
+++ b/m1/diapositivos/sessao-01-m1-f01.pptx
@@ -1910,7 +1910,41 @@
                 <a:ea typeface="Arial" pitchFamily="34" charset="-122"/>
                 <a:cs typeface="Arial" pitchFamily="34" charset="-120"/>
               </a:rPr>
-              <a:t>A Arte de Trovar e o quadro dos géneros dão-te os termos para o resto do módulo: donzela, senhora, troça; paralelismo, mestria, palavras cobertas.</a:t>
+              <a:t>A </a:t>
+            </a:r>
+            <a:pPr indent="0" marL="0">
+              <a:lnSpc>
+                <a:spcPct val="105000"/>
+              </a:lnSpc>
+              <a:buNone/>
+            </a:pPr>
+            <a:r>
+              <a:rPr lang="en-US" sz="2200" i="1" dirty="0">
+                <a:solidFill>
+                  <a:srgbClr val="F2F0EA"/>
+                </a:solidFill>
+                <a:latin typeface="Arial" pitchFamily="34" charset="0"/>
+                <a:ea typeface="Arial" pitchFamily="34" charset="-122"/>
+                <a:cs typeface="Arial" pitchFamily="34" charset="-120"/>
+              </a:rPr>
+              <a:t>Arte de Trovar</a:t>
+            </a:r>
+            <a:pPr indent="0" marL="0">
+              <a:lnSpc>
+                <a:spcPct val="105000"/>
+              </a:lnSpc>
+              <a:buNone/>
+            </a:pPr>
+            <a:r>
+              <a:rPr lang="en-US" sz="2200" dirty="0">
+                <a:solidFill>
+                  <a:srgbClr val="F2F0EA"/>
+                </a:solidFill>
+                <a:latin typeface="Arial" pitchFamily="34" charset="0"/>
+                <a:ea typeface="Arial" pitchFamily="34" charset="-122"/>
+                <a:cs typeface="Arial" pitchFamily="34" charset="-120"/>
+              </a:rPr>
+              <a:t> e o quadro dos géneros dão-te os termos para o resto do módulo: donzela, senhora, troça; paralelismo, mestria, palavras cobertas.</a:t>
             </a:r>
             <a:endParaRPr lang="en-US" sz="2200" dirty="0"/>
           </a:p>
@@ -3504,11 +3538,8 @@
                 <a:ea typeface="Georgia" pitchFamily="34" charset="-122"/>
                 <a:cs typeface="Georgia" pitchFamily="34" charset="-120"/>
               </a:rPr>
-              <a:t>Sobretudo nos séculos XIII e XIV, trovadores e jograis compuseram em galego-português cerca de 1680 cantigas profanas, de perto de 187 autores. Chegaram até nós em três grandes cancioneiros (coletâneas manuscritas): o da Ajuda, o da Biblioteca Nacional e o da Vaticana. Era poesia para ser cantada.</a:t>
-            </a:r>
-            <a:endParaRPr lang="en-US" sz="2000" dirty="0"/>
-          </a:p>
-          <a:p>
+              <a:t>Sobretudo nos séculos XIII e XIV, trovadores e jograis compuseram em </a:t>
+            </a:r>
             <a:pPr indent="0" marL="0">
               <a:lnSpc>
                 <a:spcPct val="120000"/>
@@ -3519,7 +3550,7 @@
               <a:buNone/>
             </a:pPr>
             <a:r>
-              <a:rPr lang="en-US" sz="2000" dirty="0">
+              <a:rPr lang="en-US" sz="2000" b="1" dirty="0">
                 <a:solidFill>
                   <a:srgbClr val="F2F0EA"/>
                 </a:solidFill>
@@ -3527,7 +3558,330 @@
                 <a:ea typeface="Georgia" pitchFamily="34" charset="-122"/>
                 <a:cs typeface="Georgia" pitchFamily="34" charset="-120"/>
               </a:rPr>
-              <a:t>Da música quase nada sobreviveu: só dois pergaminhos guardam melodias, o Pergaminho Vindel (cantigas de Martim Codax) e o Pergaminho Sharrer (cantigas de D. Dinis). O trovador era um poeta de origem nobre, que criava o texto e a música; o jogral, de origem humilde, era pago para cantar e tocar; o segrel, da pequena nobreza, interpretava as suas próprias composições.</a:t>
+              <a:t>galego-português</a:t>
+            </a:r>
+            <a:pPr indent="0" marL="0">
+              <a:lnSpc>
+                <a:spcPct val="120000"/>
+              </a:lnSpc>
+              <a:spcAft>
+                <a:spcPts val="1000"/>
+              </a:spcAft>
+              <a:buNone/>
+            </a:pPr>
+            <a:r>
+              <a:rPr lang="en-US" sz="2000" dirty="0">
+                <a:solidFill>
+                  <a:srgbClr val="F2F0EA"/>
+                </a:solidFill>
+                <a:latin typeface="Georgia" pitchFamily="34" charset="0"/>
+                <a:ea typeface="Georgia" pitchFamily="34" charset="-122"/>
+                <a:cs typeface="Georgia" pitchFamily="34" charset="-120"/>
+              </a:rPr>
+              <a:t> cerca de 1680 cantigas profanas, de perto de 187 autores. Chegaram até nós em três grandes </a:t>
+            </a:r>
+            <a:pPr indent="0" marL="0">
+              <a:lnSpc>
+                <a:spcPct val="120000"/>
+              </a:lnSpc>
+              <a:spcAft>
+                <a:spcPts val="1000"/>
+              </a:spcAft>
+              <a:buNone/>
+            </a:pPr>
+            <a:r>
+              <a:rPr lang="en-US" sz="2000" b="1" dirty="0">
+                <a:solidFill>
+                  <a:srgbClr val="F2F0EA"/>
+                </a:solidFill>
+                <a:latin typeface="Georgia" pitchFamily="34" charset="0"/>
+                <a:ea typeface="Georgia" pitchFamily="34" charset="-122"/>
+                <a:cs typeface="Georgia" pitchFamily="34" charset="-120"/>
+              </a:rPr>
+              <a:t>cancioneiros</a:t>
+            </a:r>
+            <a:pPr indent="0" marL="0">
+              <a:lnSpc>
+                <a:spcPct val="120000"/>
+              </a:lnSpc>
+              <a:spcAft>
+                <a:spcPts val="1000"/>
+              </a:spcAft>
+              <a:buNone/>
+            </a:pPr>
+            <a:r>
+              <a:rPr lang="en-US" sz="2000" dirty="0">
+                <a:solidFill>
+                  <a:srgbClr val="F2F0EA"/>
+                </a:solidFill>
+                <a:latin typeface="Georgia" pitchFamily="34" charset="0"/>
+                <a:ea typeface="Georgia" pitchFamily="34" charset="-122"/>
+                <a:cs typeface="Georgia" pitchFamily="34" charset="-120"/>
+              </a:rPr>
+              <a:t> (coletâneas manuscritas): o da Ajuda, o da Biblioteca Nacional e o da Vaticana. Era poesia para ser </a:t>
+            </a:r>
+            <a:pPr indent="0" marL="0">
+              <a:lnSpc>
+                <a:spcPct val="120000"/>
+              </a:lnSpc>
+              <a:spcAft>
+                <a:spcPts val="1000"/>
+              </a:spcAft>
+              <a:buNone/>
+            </a:pPr>
+            <a:r>
+              <a:rPr lang="en-US" sz="2000" b="1" dirty="0">
+                <a:solidFill>
+                  <a:srgbClr val="F2F0EA"/>
+                </a:solidFill>
+                <a:latin typeface="Georgia" pitchFamily="34" charset="0"/>
+                <a:ea typeface="Georgia" pitchFamily="34" charset="-122"/>
+                <a:cs typeface="Georgia" pitchFamily="34" charset="-120"/>
+              </a:rPr>
+              <a:t>cantada</a:t>
+            </a:r>
+            <a:pPr indent="0" marL="0">
+              <a:lnSpc>
+                <a:spcPct val="120000"/>
+              </a:lnSpc>
+              <a:spcAft>
+                <a:spcPts val="1000"/>
+              </a:spcAft>
+              <a:buNone/>
+            </a:pPr>
+            <a:r>
+              <a:rPr lang="en-US" sz="2000" dirty="0">
+                <a:solidFill>
+                  <a:srgbClr val="F2F0EA"/>
+                </a:solidFill>
+                <a:latin typeface="Georgia" pitchFamily="34" charset="0"/>
+                <a:ea typeface="Georgia" pitchFamily="34" charset="-122"/>
+                <a:cs typeface="Georgia" pitchFamily="34" charset="-120"/>
+              </a:rPr>
+              <a:t>.</a:t>
+            </a:r>
+            <a:endParaRPr lang="en-US" sz="2000" dirty="0"/>
+          </a:p>
+          <a:p>
+            <a:pPr indent="0" marL="0">
+              <a:lnSpc>
+                <a:spcPct val="120000"/>
+              </a:lnSpc>
+              <a:spcAft>
+                <a:spcPts val="1000"/>
+              </a:spcAft>
+              <a:buNone/>
+            </a:pPr>
+            <a:r>
+              <a:rPr lang="en-US" sz="2000" dirty="0">
+                <a:solidFill>
+                  <a:srgbClr val="F2F0EA"/>
+                </a:solidFill>
+                <a:latin typeface="Georgia" pitchFamily="34" charset="0"/>
+                <a:ea typeface="Georgia" pitchFamily="34" charset="-122"/>
+                <a:cs typeface="Georgia" pitchFamily="34" charset="-120"/>
+              </a:rPr>
+              <a:t>Da música quase nada sobreviveu: só dois pergaminhos guardam melodias, o </a:t>
+            </a:r>
+            <a:pPr indent="0" marL="0">
+              <a:lnSpc>
+                <a:spcPct val="120000"/>
+              </a:lnSpc>
+              <a:spcAft>
+                <a:spcPts val="1000"/>
+              </a:spcAft>
+              <a:buNone/>
+            </a:pPr>
+            <a:r>
+              <a:rPr lang="en-US" sz="2000" b="1" dirty="0">
+                <a:solidFill>
+                  <a:srgbClr val="F2F0EA"/>
+                </a:solidFill>
+                <a:latin typeface="Georgia" pitchFamily="34" charset="0"/>
+                <a:ea typeface="Georgia" pitchFamily="34" charset="-122"/>
+                <a:cs typeface="Georgia" pitchFamily="34" charset="-120"/>
+              </a:rPr>
+              <a:t>Pergaminho Vindel</a:t>
+            </a:r>
+            <a:pPr indent="0" marL="0">
+              <a:lnSpc>
+                <a:spcPct val="120000"/>
+              </a:lnSpc>
+              <a:spcAft>
+                <a:spcPts val="1000"/>
+              </a:spcAft>
+              <a:buNone/>
+            </a:pPr>
+            <a:r>
+              <a:rPr lang="en-US" sz="2000" dirty="0">
+                <a:solidFill>
+                  <a:srgbClr val="F2F0EA"/>
+                </a:solidFill>
+                <a:latin typeface="Georgia" pitchFamily="34" charset="0"/>
+                <a:ea typeface="Georgia" pitchFamily="34" charset="-122"/>
+                <a:cs typeface="Georgia" pitchFamily="34" charset="-120"/>
+              </a:rPr>
+              <a:t> (cantigas de Martim Codax) e o </a:t>
+            </a:r>
+            <a:pPr indent="0" marL="0">
+              <a:lnSpc>
+                <a:spcPct val="120000"/>
+              </a:lnSpc>
+              <a:spcAft>
+                <a:spcPts val="1000"/>
+              </a:spcAft>
+              <a:buNone/>
+            </a:pPr>
+            <a:r>
+              <a:rPr lang="en-US" sz="2000" b="1" dirty="0">
+                <a:solidFill>
+                  <a:srgbClr val="F2F0EA"/>
+                </a:solidFill>
+                <a:latin typeface="Georgia" pitchFamily="34" charset="0"/>
+                <a:ea typeface="Georgia" pitchFamily="34" charset="-122"/>
+                <a:cs typeface="Georgia" pitchFamily="34" charset="-120"/>
+              </a:rPr>
+              <a:t>Pergaminho Sharrer</a:t>
+            </a:r>
+            <a:pPr indent="0" marL="0">
+              <a:lnSpc>
+                <a:spcPct val="120000"/>
+              </a:lnSpc>
+              <a:spcAft>
+                <a:spcPts val="1000"/>
+              </a:spcAft>
+              <a:buNone/>
+            </a:pPr>
+            <a:r>
+              <a:rPr lang="en-US" sz="2000" dirty="0">
+                <a:solidFill>
+                  <a:srgbClr val="F2F0EA"/>
+                </a:solidFill>
+                <a:latin typeface="Georgia" pitchFamily="34" charset="0"/>
+                <a:ea typeface="Georgia" pitchFamily="34" charset="-122"/>
+                <a:cs typeface="Georgia" pitchFamily="34" charset="-120"/>
+              </a:rPr>
+              <a:t> (cantigas de D. Dinis). O </a:t>
+            </a:r>
+            <a:pPr indent="0" marL="0">
+              <a:lnSpc>
+                <a:spcPct val="120000"/>
+              </a:lnSpc>
+              <a:spcAft>
+                <a:spcPts val="1000"/>
+              </a:spcAft>
+              <a:buNone/>
+            </a:pPr>
+            <a:r>
+              <a:rPr lang="en-US" sz="2000" b="1" dirty="0">
+                <a:solidFill>
+                  <a:srgbClr val="F2F0EA"/>
+                </a:solidFill>
+                <a:latin typeface="Georgia" pitchFamily="34" charset="0"/>
+                <a:ea typeface="Georgia" pitchFamily="34" charset="-122"/>
+                <a:cs typeface="Georgia" pitchFamily="34" charset="-120"/>
+              </a:rPr>
+              <a:t>trovador</a:t>
+            </a:r>
+            <a:pPr indent="0" marL="0">
+              <a:lnSpc>
+                <a:spcPct val="120000"/>
+              </a:lnSpc>
+              <a:spcAft>
+                <a:spcPts val="1000"/>
+              </a:spcAft>
+              <a:buNone/>
+            </a:pPr>
+            <a:r>
+              <a:rPr lang="en-US" sz="2000" dirty="0">
+                <a:solidFill>
+                  <a:srgbClr val="F2F0EA"/>
+                </a:solidFill>
+                <a:latin typeface="Georgia" pitchFamily="34" charset="0"/>
+                <a:ea typeface="Georgia" pitchFamily="34" charset="-122"/>
+                <a:cs typeface="Georgia" pitchFamily="34" charset="-120"/>
+              </a:rPr>
+              <a:t> era um poeta de origem nobre, que criava o texto e a música; o </a:t>
+            </a:r>
+            <a:pPr indent="0" marL="0">
+              <a:lnSpc>
+                <a:spcPct val="120000"/>
+              </a:lnSpc>
+              <a:spcAft>
+                <a:spcPts val="1000"/>
+              </a:spcAft>
+              <a:buNone/>
+            </a:pPr>
+            <a:r>
+              <a:rPr lang="en-US" sz="2000" b="1" dirty="0">
+                <a:solidFill>
+                  <a:srgbClr val="F2F0EA"/>
+                </a:solidFill>
+                <a:latin typeface="Georgia" pitchFamily="34" charset="0"/>
+                <a:ea typeface="Georgia" pitchFamily="34" charset="-122"/>
+                <a:cs typeface="Georgia" pitchFamily="34" charset="-120"/>
+              </a:rPr>
+              <a:t>jogral</a:t>
+            </a:r>
+            <a:pPr indent="0" marL="0">
+              <a:lnSpc>
+                <a:spcPct val="120000"/>
+              </a:lnSpc>
+              <a:spcAft>
+                <a:spcPts val="1000"/>
+              </a:spcAft>
+              <a:buNone/>
+            </a:pPr>
+            <a:r>
+              <a:rPr lang="en-US" sz="2000" dirty="0">
+                <a:solidFill>
+                  <a:srgbClr val="F2F0EA"/>
+                </a:solidFill>
+                <a:latin typeface="Georgia" pitchFamily="34" charset="0"/>
+                <a:ea typeface="Georgia" pitchFamily="34" charset="-122"/>
+                <a:cs typeface="Georgia" pitchFamily="34" charset="-120"/>
+              </a:rPr>
+              <a:t>, de origem humilde, era pago para cantar e tocar; o </a:t>
+            </a:r>
+            <a:pPr indent="0" marL="0">
+              <a:lnSpc>
+                <a:spcPct val="120000"/>
+              </a:lnSpc>
+              <a:spcAft>
+                <a:spcPts val="1000"/>
+              </a:spcAft>
+              <a:buNone/>
+            </a:pPr>
+            <a:r>
+              <a:rPr lang="en-US" sz="2000" b="1" dirty="0">
+                <a:solidFill>
+                  <a:srgbClr val="F2F0EA"/>
+                </a:solidFill>
+                <a:latin typeface="Georgia" pitchFamily="34" charset="0"/>
+                <a:ea typeface="Georgia" pitchFamily="34" charset="-122"/>
+                <a:cs typeface="Georgia" pitchFamily="34" charset="-120"/>
+              </a:rPr>
+              <a:t>segrel</a:t>
+            </a:r>
+            <a:pPr indent="0" marL="0">
+              <a:lnSpc>
+                <a:spcPct val="120000"/>
+              </a:lnSpc>
+              <a:spcAft>
+                <a:spcPts val="1000"/>
+              </a:spcAft>
+              <a:buNone/>
+            </a:pPr>
+            <a:r>
+              <a:rPr lang="en-US" sz="2000" dirty="0">
+                <a:solidFill>
+                  <a:srgbClr val="F2F0EA"/>
+                </a:solidFill>
+                <a:latin typeface="Georgia" pitchFamily="34" charset="0"/>
+                <a:ea typeface="Georgia" pitchFamily="34" charset="-122"/>
+                <a:cs typeface="Georgia" pitchFamily="34" charset="-120"/>
+              </a:rPr>
+              <a:t>, da pequena nobreza, interpretava as suas próprias composições.</a:t>
             </a:r>
             <a:endParaRPr lang="en-US" sz="2000" dirty="0"/>
           </a:p>
@@ -6887,7 +7241,41 @@
                 <a:ea typeface="Arial" pitchFamily="34" charset="-122"/>
                 <a:cs typeface="Arial" pitchFamily="34" charset="-120"/>
               </a:rPr>
-              <a:t>No fim, o cartão extra: «Cancioneiro da Ajuda»</a:t>
+              <a:t>No fim, o cartão extra: «</a:t>
+            </a:r>
+            <a:pPr indent="0" marL="0">
+              <a:lnSpc>
+                <a:spcPct val="105000"/>
+              </a:lnSpc>
+              <a:buNone/>
+            </a:pPr>
+            <a:r>
+              <a:rPr lang="en-US" sz="2200" i="1" dirty="0">
+                <a:solidFill>
+                  <a:srgbClr val="F2F0EA"/>
+                </a:solidFill>
+                <a:latin typeface="Arial" pitchFamily="34" charset="0"/>
+                <a:ea typeface="Arial" pitchFamily="34" charset="-122"/>
+                <a:cs typeface="Arial" pitchFamily="34" charset="-120"/>
+              </a:rPr>
+              <a:t>Cancioneiro da Ajuda</a:t>
+            </a:r>
+            <a:pPr indent="0" marL="0">
+              <a:lnSpc>
+                <a:spcPct val="105000"/>
+              </a:lnSpc>
+              <a:buNone/>
+            </a:pPr>
+            <a:r>
+              <a:rPr lang="en-US" sz="2200" dirty="0">
+                <a:solidFill>
+                  <a:srgbClr val="F2F0EA"/>
+                </a:solidFill>
+                <a:latin typeface="Arial" pitchFamily="34" charset="0"/>
+                <a:ea typeface="Arial" pitchFamily="34" charset="-122"/>
+                <a:cs typeface="Arial" pitchFamily="34" charset="-120"/>
+              </a:rPr>
+              <a:t>»</a:t>
             </a:r>
             <a:endParaRPr lang="en-US" sz="2200" dirty="0"/>
           </a:p>
